--- a/document/假新聞偵測系統實驗報告.pptx
+++ b/document/假新聞偵測系統實驗報告.pptx
@@ -5,7 +5,7 @@
     <p:sldMasterId id="2147483648" r:id="rId1"/>
   </p:sldMasterIdLst>
   <p:notesMasterIdLst>
-    <p:notesMasterId r:id="rId15"/>
+    <p:notesMasterId r:id="rId16"/>
   </p:notesMasterIdLst>
   <p:sldIdLst>
     <p:sldId id="256" r:id="rId2"/>
@@ -18,9 +18,10 @@
     <p:sldId id="260" r:id="rId9"/>
     <p:sldId id="261" r:id="rId10"/>
     <p:sldId id="262" r:id="rId11"/>
-    <p:sldId id="263" r:id="rId12"/>
-    <p:sldId id="267" r:id="rId13"/>
-    <p:sldId id="264" r:id="rId14"/>
+    <p:sldId id="269" r:id="rId12"/>
+    <p:sldId id="263" r:id="rId13"/>
+    <p:sldId id="267" r:id="rId14"/>
+    <p:sldId id="264" r:id="rId15"/>
   </p:sldIdLst>
   <p:sldSz cx="12192000" cy="6858000"/>
   <p:notesSz cx="6858000" cy="12192000"/>
@@ -139,7 +140,6 @@
   </mc:AlternateContent>
   <c:chart>
     <c:title>
-      <c:layout/>
       <c:overlay val="0"/>
       <c:spPr>
         <a:noFill/>
@@ -292,10 +292,9 @@
                   <a:lstStyle/>
                   <a:p>
                     <a:r>
-                      <a:rPr lang="en-US" altLang="zh-TW" dirty="0" smtClean="0"/>
+                      <a:rPr lang="en-US" altLang="zh-TW" dirty="0"/>
                       <a:t>54.8%</a:t>
                     </a:r>
-                    <a:endParaRPr lang="en-US" altLang="zh-TW" dirty="0"/>
                   </a:p>
                 </c:rich>
               </c:tx>
@@ -308,7 +307,7 @@
               <c:showBubbleSize val="0"/>
               <c:extLst>
                 <c:ext xmlns:c15="http://schemas.microsoft.com/office/drawing/2012/chart" uri="{CE6537A1-D6FC-4f65-9D91-7224C49458BB}">
-                  <c15:layout/>
+                  <c15:showDataLabelsRange val="0"/>
                 </c:ext>
                 <c:ext xmlns:c16="http://schemas.microsoft.com/office/drawing/2014/chart" uri="{C3380CC4-5D6E-409C-BE32-E72D297353CC}">
                   <c16:uniqueId val="{00000002-4687-44EB-8BCD-485A058ED8C4}"/>
@@ -409,7 +408,6 @@
     </c:plotArea>
     <c:legend>
       <c:legendPos val="b"/>
-      <c:layout/>
       <c:overlay val="0"/>
       <c:spPr>
         <a:noFill/>
@@ -1600,7 +1598,7 @@
           <a:p>
             <a:fld id="{F7021451-1387-4CA6-816F-3879F97B5CBC}" type="slidenum">
               <a:rPr lang="en-US"/>
-              <a:t>11</a:t>
+              <a:t>12</a:t>
             </a:fld>
             <a:endParaRPr lang="en-US"/>
           </a:p>
@@ -1684,7 +1682,7 @@
           <a:p>
             <a:fld id="{F7021451-1387-4CA6-816F-3879F97B5CBC}" type="slidenum">
               <a:rPr lang="en-US"/>
-              <a:t>12</a:t>
+              <a:t>13</a:t>
             </a:fld>
             <a:endParaRPr lang="en-US"/>
           </a:p>
@@ -1768,7 +1766,7 @@
           <a:p>
             <a:fld id="{F7021451-1387-4CA6-816F-3879F97B5CBC}" type="slidenum">
               <a:rPr lang="en-US"/>
-              <a:t>13</a:t>
+              <a:t>14</a:t>
             </a:fld>
             <a:endParaRPr lang="en-US"/>
           </a:p>
@@ -4600,6 +4598,66 @@
 
 <file path=ppt/slides/slide11.xml><?xml version="1.0" encoding="utf-8"?>
 <p:sld xmlns:a="http://schemas.openxmlformats.org/drawingml/2006/main" xmlns:r="http://schemas.openxmlformats.org/officeDocument/2006/relationships" xmlns:p="http://schemas.openxmlformats.org/presentationml/2006/main">
+  <p:cSld>
+    <p:spTree>
+      <p:nvGrpSpPr>
+        <p:cNvPr id="1" name=""/>
+        <p:cNvGrpSpPr/>
+        <p:nvPr/>
+      </p:nvGrpSpPr>
+      <p:grpSpPr>
+        <a:xfrm>
+          <a:off x="0" y="0"/>
+          <a:ext cx="0" cy="0"/>
+          <a:chOff x="0" y="0"/>
+          <a:chExt cx="0" cy="0"/>
+        </a:xfrm>
+      </p:grpSpPr>
+      <p:pic>
+        <p:nvPicPr>
+          <p:cNvPr id="9" name="圖片 8">
+            <a:extLst>
+              <a:ext uri="{FF2B5EF4-FFF2-40B4-BE49-F238E27FC236}">
+                <a16:creationId xmlns:a16="http://schemas.microsoft.com/office/drawing/2014/main" id="{1AB7079B-1FCA-BF69-7812-57ED25C85B32}"/>
+              </a:ext>
+            </a:extLst>
+          </p:cNvPr>
+          <p:cNvPicPr>
+            <a:picLocks noChangeAspect="1"/>
+          </p:cNvPicPr>
+          <p:nvPr/>
+        </p:nvPicPr>
+        <p:blipFill>
+          <a:blip r:embed="rId2"/>
+          <a:stretch>
+            <a:fillRect/>
+          </a:stretch>
+        </p:blipFill>
+        <p:spPr>
+          <a:xfrm>
+            <a:off x="532623" y="1202722"/>
+            <a:ext cx="11126753" cy="4086795"/>
+          </a:xfrm>
+          <a:prstGeom prst="rect">
+            <a:avLst/>
+          </a:prstGeom>
+        </p:spPr>
+      </p:pic>
+    </p:spTree>
+    <p:extLst>
+      <p:ext uri="{BB962C8B-B14F-4D97-AF65-F5344CB8AC3E}">
+        <p14:creationId xmlns:p14="http://schemas.microsoft.com/office/powerpoint/2010/main" val="1598266884"/>
+      </p:ext>
+    </p:extLst>
+  </p:cSld>
+  <p:clrMapOvr>
+    <a:masterClrMapping/>
+  </p:clrMapOvr>
+</p:sld>
+</file>
+
+<file path=ppt/slides/slide12.xml><?xml version="1.0" encoding="utf-8"?>
+<p:sld xmlns:a="http://schemas.openxmlformats.org/drawingml/2006/main" xmlns:r="http://schemas.openxmlformats.org/officeDocument/2006/relationships" xmlns:p="http://schemas.openxmlformats.org/presentationml/2006/main">
   <p:cSld name="Slide 8">
     <p:bg>
       <p:bgPr>
@@ -4769,7 +4827,7 @@
           <p:nvPr>
             <p:extLst>
               <p:ext uri="{D42A27DB-BD31-4B8C-83A1-F6EECF244321}">
-                <p14:modId xmlns:p14="http://schemas.microsoft.com/office/powerpoint/2010/main" val="1579011935"/>
+                <p14:modId xmlns:p14="http://schemas.microsoft.com/office/powerpoint/2010/main" val="2484209720"/>
               </p:ext>
             </p:extLst>
           </p:nvPr>
@@ -5304,7 +5362,29 @@
                           <a:ea typeface="Calibri" pitchFamily="34" charset="-122"/>
                           <a:cs typeface="Calibri" pitchFamily="34" charset="-120"/>
                         </a:rPr>
-                        <a:t>REAL（99.96%）✓</a:t>
+                        <a:t>REAL</a:t>
+                      </a:r>
+                      <a:r>
+                        <a:rPr lang="zh-TW" altLang="en-US" sz="1200" b="1" dirty="0">
+                          <a:solidFill>
+                            <a:srgbClr val="2F3C7E"/>
+                          </a:solidFill>
+                          <a:latin typeface="Calibri" pitchFamily="34" charset="0"/>
+                          <a:ea typeface="Calibri" pitchFamily="34" charset="-122"/>
+                          <a:cs typeface="Calibri" pitchFamily="34" charset="-120"/>
+                        </a:rPr>
+                        <a:t> </a:t>
+                      </a:r>
+                      <a:r>
+                        <a:rPr lang="en-US" sz="1200" b="1" dirty="0">
+                          <a:solidFill>
+                            <a:srgbClr val="2F3C7E"/>
+                          </a:solidFill>
+                          <a:latin typeface="Calibri" pitchFamily="34" charset="0"/>
+                          <a:ea typeface="Calibri" pitchFamily="34" charset="-122"/>
+                          <a:cs typeface="Calibri" pitchFamily="34" charset="-120"/>
+                        </a:rPr>
+                        <a:t>✓</a:t>
                       </a:r>
                       <a:endParaRPr lang="en-US" sz="1200" dirty="0">
                         <a:latin typeface="Calibri" charset="0"/>
@@ -5571,7 +5651,29 @@
                           <a:ea typeface="Calibri" pitchFamily="34" charset="-122"/>
                           <a:cs typeface="Calibri" pitchFamily="34" charset="-120"/>
                         </a:rPr>
-                        <a:t>REAL（90.68%）✓</a:t>
+                        <a:t>REAL</a:t>
+                      </a:r>
+                      <a:r>
+                        <a:rPr lang="zh-TW" altLang="en-US" sz="1200" b="1" dirty="0">
+                          <a:solidFill>
+                            <a:srgbClr val="2F3C7E"/>
+                          </a:solidFill>
+                          <a:latin typeface="Calibri" pitchFamily="34" charset="0"/>
+                          <a:ea typeface="Calibri" pitchFamily="34" charset="-122"/>
+                          <a:cs typeface="Calibri" pitchFamily="34" charset="-120"/>
+                        </a:rPr>
+                        <a:t> </a:t>
+                      </a:r>
+                      <a:r>
+                        <a:rPr lang="en-US" sz="1200" b="1" dirty="0">
+                          <a:solidFill>
+                            <a:srgbClr val="2F3C7E"/>
+                          </a:solidFill>
+                          <a:latin typeface="Calibri" pitchFamily="34" charset="0"/>
+                          <a:ea typeface="Calibri" pitchFamily="34" charset="-122"/>
+                          <a:cs typeface="Calibri" pitchFamily="34" charset="-120"/>
+                        </a:rPr>
+                        <a:t>✓</a:t>
                       </a:r>
                       <a:endParaRPr lang="en-US" sz="1200" dirty="0">
                         <a:latin typeface="Calibri" charset="0"/>
@@ -5838,7 +5940,29 @@
                           <a:ea typeface="Calibri" pitchFamily="34" charset="-122"/>
                           <a:cs typeface="Calibri" pitchFamily="34" charset="-120"/>
                         </a:rPr>
-                        <a:t>FAKE（99.97%）✓</a:t>
+                        <a:t>FAKE</a:t>
+                      </a:r>
+                      <a:r>
+                        <a:rPr lang="zh-TW" altLang="en-US" sz="1200" b="1" dirty="0">
+                          <a:solidFill>
+                            <a:srgbClr val="2F3C7E"/>
+                          </a:solidFill>
+                          <a:latin typeface="Calibri" pitchFamily="34" charset="0"/>
+                          <a:ea typeface="Calibri" pitchFamily="34" charset="-122"/>
+                          <a:cs typeface="Calibri" pitchFamily="34" charset="-120"/>
+                        </a:rPr>
+                        <a:t> </a:t>
+                      </a:r>
+                      <a:r>
+                        <a:rPr lang="en-US" sz="1200" b="1" dirty="0">
+                          <a:solidFill>
+                            <a:srgbClr val="2F3C7E"/>
+                          </a:solidFill>
+                          <a:latin typeface="Calibri" pitchFamily="34" charset="0"/>
+                          <a:ea typeface="Calibri" pitchFamily="34" charset="-122"/>
+                          <a:cs typeface="Calibri" pitchFamily="34" charset="-120"/>
+                        </a:rPr>
+                        <a:t>✓</a:t>
                       </a:r>
                       <a:endParaRPr lang="en-US" sz="1200" dirty="0">
                         <a:latin typeface="Calibri" charset="0"/>
@@ -6105,7 +6229,29 @@
                           <a:ea typeface="Calibri" pitchFamily="34" charset="-122"/>
                           <a:cs typeface="Calibri" pitchFamily="34" charset="-120"/>
                         </a:rPr>
-                        <a:t>FAKE（99.96%）✓</a:t>
+                        <a:t>FAKE</a:t>
+                      </a:r>
+                      <a:r>
+                        <a:rPr lang="zh-TW" altLang="en-US" sz="1200" b="1" dirty="0">
+                          <a:solidFill>
+                            <a:srgbClr val="2F3C7E"/>
+                          </a:solidFill>
+                          <a:latin typeface="Calibri" pitchFamily="34" charset="0"/>
+                          <a:ea typeface="Calibri" pitchFamily="34" charset="-122"/>
+                          <a:cs typeface="Calibri" pitchFamily="34" charset="-120"/>
+                        </a:rPr>
+                        <a:t> </a:t>
+                      </a:r>
+                      <a:r>
+                        <a:rPr lang="en-US" sz="1200" b="1" dirty="0">
+                          <a:solidFill>
+                            <a:srgbClr val="2F3C7E"/>
+                          </a:solidFill>
+                          <a:latin typeface="Calibri" pitchFamily="34" charset="0"/>
+                          <a:ea typeface="Calibri" pitchFamily="34" charset="-122"/>
+                          <a:cs typeface="Calibri" pitchFamily="34" charset="-120"/>
+                        </a:rPr>
+                        <a:t>✓</a:t>
                       </a:r>
                       <a:endParaRPr lang="en-US" sz="1200" dirty="0">
                         <a:latin typeface="Calibri" charset="0"/>
@@ -6528,7 +6674,7 @@
 </p:sld>
 </file>
 
-<file path=ppt/slides/slide12.xml><?xml version="1.0" encoding="utf-8"?>
+<file path=ppt/slides/slide13.xml><?xml version="1.0" encoding="utf-8"?>
 <p:sld xmlns:a="http://schemas.openxmlformats.org/drawingml/2006/main" xmlns:r="http://schemas.openxmlformats.org/officeDocument/2006/relationships" xmlns:p="http://schemas.openxmlformats.org/presentationml/2006/main">
   <p:cSld>
     <p:bg>
@@ -6598,7 +6744,7 @@
               <a:buNone/>
             </a:pPr>
             <a:r>
-              <a:rPr lang="en-US" altLang="zh-TW" sz="1200" b="1" dirty="0" smtClean="0">
+              <a:rPr lang="en-US" altLang="zh-TW" sz="1200" b="1" dirty="0">
                 <a:solidFill>
                   <a:srgbClr val="FFFFFF"/>
                 </a:solidFill>
@@ -6609,7 +6755,7 @@
               <a:t>08</a:t>
             </a:r>
             <a:r>
-              <a:rPr lang="zh-TW" altLang="en-US" sz="1200" b="1" dirty="0" smtClean="0">
+              <a:rPr lang="zh-TW" altLang="en-US" sz="1200" b="1" dirty="0">
                 <a:solidFill>
                   <a:srgbClr val="FFFFFF"/>
                 </a:solidFill>
@@ -6648,7 +6794,7 @@
               <a:buNone/>
             </a:pPr>
             <a:r>
-              <a:rPr lang="zh-TW" altLang="en-US" sz="3000" dirty="0" smtClean="0"/>
+              <a:rPr lang="zh-TW" altLang="en-US" sz="3000" dirty="0"/>
               <a:t>直覺性使用模型</a:t>
             </a:r>
             <a:endParaRPr lang="en-US" sz="3000" dirty="0"/>
@@ -6676,17 +6822,6 @@
           <a:bodyPr wrap="square" lIns="0" tIns="0" rIns="0" bIns="0" rtlCol="0" anchor="ctr"/>
           <a:lstStyle/>
           <a:p>
-            <a:r>
-              <a:rPr lang="zh-TW" altLang="en-US" sz="1400" i="1" dirty="0" smtClean="0">
-                <a:solidFill>
-                  <a:srgbClr val="6B6B6B"/>
-                </a:solidFill>
-                <a:latin typeface="Calibri" pitchFamily="34" charset="0"/>
-                <a:ea typeface="Calibri" pitchFamily="34" charset="-122"/>
-                <a:cs typeface="Calibri" pitchFamily="34" charset="-120"/>
-              </a:rPr>
-              <a:t>一</a:t>
-            </a:r>
             <a:r>
               <a:rPr lang="zh-TW" altLang="en-US" sz="1400" i="1" dirty="0">
                 <a:solidFill>
@@ -6696,7 +6831,7 @@
                 <a:ea typeface="Calibri" pitchFamily="34" charset="-122"/>
                 <a:cs typeface="Calibri" pitchFamily="34" charset="-120"/>
               </a:rPr>
-              <a:t>鍵取得真</a:t>
+              <a:t>一鍵取得真</a:t>
             </a:r>
             <a:r>
               <a:rPr lang="en-US" altLang="zh-TW" sz="1400" i="1" dirty="0">
@@ -6863,7 +6998,7 @@
 </p:sld>
 </file>
 
-<file path=ppt/slides/slide13.xml><?xml version="1.0" encoding="utf-8"?>
+<file path=ppt/slides/slide14.xml><?xml version="1.0" encoding="utf-8"?>
 <p:sld xmlns:a="http://schemas.openxmlformats.org/drawingml/2006/main" xmlns:r="http://schemas.openxmlformats.org/officeDocument/2006/relationships" xmlns:p="http://schemas.openxmlformats.org/presentationml/2006/main">
   <p:cSld name="Slide 9">
     <p:bg>
@@ -6955,17 +7090,6 @@
               <a:buNone/>
             </a:pPr>
             <a:r>
-              <a:rPr lang="en-US" sz="1200" b="1" dirty="0" smtClean="0">
-                <a:solidFill>
-                  <a:srgbClr val="FFFFFF"/>
-                </a:solidFill>
-                <a:latin typeface="Calibri" pitchFamily="34" charset="0"/>
-                <a:ea typeface="Calibri" pitchFamily="34" charset="-122"/>
-                <a:cs typeface="Calibri" pitchFamily="34" charset="-120"/>
-              </a:rPr>
-              <a:t>09  </a:t>
-            </a:r>
-            <a:r>
               <a:rPr lang="en-US" sz="1200" b="1" dirty="0">
                 <a:solidFill>
                   <a:srgbClr val="FFFFFF"/>
@@ -6974,7 +7098,7 @@
                 <a:ea typeface="Calibri" pitchFamily="34" charset="-122"/>
                 <a:cs typeface="Calibri" pitchFamily="34" charset="-120"/>
               </a:rPr>
-              <a:t>結語</a:t>
+              <a:t>09  結語</a:t>
             </a:r>
             <a:endParaRPr lang="en-US" sz="1200" dirty="0"/>
           </a:p>
@@ -7373,45 +7497,6 @@
               <a:t>持續優化模型，強化對新型態假新聞手法的泛化能力</a:t>
             </a:r>
             <a:endParaRPr lang="en-US" sz="1400" dirty="0"/>
-          </a:p>
-        </p:txBody>
-      </p:sp>
-      <p:sp>
-        <p:nvSpPr>
-          <p:cNvPr id="14" name="Text 12"/>
-          <p:cNvSpPr/>
-          <p:nvPr/>
-        </p:nvSpPr>
-        <p:spPr>
-          <a:xfrm>
-            <a:off x="640080" y="5989320"/>
-            <a:ext cx="10881360" cy="365760"/>
-          </a:xfrm>
-          <a:prstGeom prst="rect">
-            <a:avLst/>
-          </a:prstGeom>
-          <a:noFill/>
-          <a:ln/>
-        </p:spPr>
-        <p:txBody>
-          <a:bodyPr wrap="square" lIns="0" tIns="0" rIns="0" bIns="0" rtlCol="0" anchor="ctr"/>
-          <a:lstStyle/>
-          <a:p>
-            <a:pPr marL="0" indent="0">
-              <a:buNone/>
-            </a:pPr>
-            <a:r>
-              <a:rPr lang="en-US" sz="1300" i="1" dirty="0">
-                <a:solidFill>
-                  <a:srgbClr val="8C9BD6"/>
-                </a:solidFill>
-                <a:latin typeface="Calibri" pitchFamily="34" charset="0"/>
-                <a:ea typeface="Calibri" pitchFamily="34" charset="-122"/>
-                <a:cs typeface="Calibri" pitchFamily="34" charset="-120"/>
-              </a:rPr>
-              <a:t>謝謝聆聽　／　112820003 辛政隆　·　112820025 陳翊揚</a:t>
-            </a:r>
-            <a:endParaRPr lang="en-US" sz="1300" dirty="0"/>
           </a:p>
         </p:txBody>
       </p:sp>
@@ -8236,7 +8321,7 @@
               <a:buNone/>
             </a:pPr>
             <a:r>
-              <a:rPr lang="en-US" sz="3000" b="1" dirty="0" err="1" smtClean="0">
+              <a:rPr lang="en-US" sz="3000" b="1" dirty="0" err="1">
                 <a:solidFill>
                   <a:srgbClr val="2B2B2B"/>
                 </a:solidFill>
@@ -8247,7 +8332,7 @@
               <a:t>資料集介紹</a:t>
             </a:r>
             <a:r>
-              <a:rPr lang="en-US" altLang="zh-TW" sz="3000" b="1" dirty="0" smtClean="0">
+              <a:rPr lang="en-US" altLang="zh-TW" sz="3000" b="1" dirty="0">
                 <a:solidFill>
                   <a:srgbClr val="2B2B2B"/>
                 </a:solidFill>
@@ -10294,7 +10379,7 @@
               <a:buNone/>
             </a:pPr>
             <a:r>
-              <a:rPr lang="en-US" altLang="zh-TW" sz="1250" dirty="0" smtClean="0"/>
+              <a:rPr lang="en-US" altLang="zh-TW" sz="1250" dirty="0"/>
               <a:t>45.2%</a:t>
             </a:r>
             <a:endParaRPr lang="en-US" sz="1250" dirty="0"/>
@@ -11176,7 +11261,7 @@
               <a:buNone/>
             </a:pPr>
             <a:r>
-              <a:rPr lang="en-US" altLang="zh-TW" sz="1500" dirty="0" smtClean="0"/>
+              <a:rPr lang="en-US" altLang="zh-TW" sz="1500" dirty="0"/>
               <a:t>True.csv</a:t>
             </a:r>
             <a:endParaRPr lang="en-US" sz="1500" dirty="0"/>
@@ -11233,7 +11318,7 @@
               <a:buNone/>
             </a:pPr>
             <a:r>
-              <a:rPr lang="en-US" altLang="zh-TW" sz="1500" dirty="0" smtClean="0"/>
+              <a:rPr lang="en-US" altLang="zh-TW" sz="1500" dirty="0"/>
               <a:t>Fake.csv</a:t>
             </a:r>
             <a:endParaRPr lang="en-US" sz="1500" dirty="0"/>
@@ -11330,7 +11415,7 @@
               <a:buNone/>
             </a:pPr>
             <a:r>
-              <a:rPr lang="en-US" altLang="zh-TW" sz="1500" dirty="0" smtClean="0"/>
+              <a:rPr lang="en-US" altLang="zh-TW" sz="1500" dirty="0"/>
               <a:t>Cleaned_news.csv</a:t>
             </a:r>
             <a:endParaRPr lang="en-US" sz="1500" dirty="0"/>
@@ -13984,7 +14069,7 @@
         <p:spPr>
           <a:xfrm>
             <a:off x="640080" y="2331720"/>
-            <a:ext cx="5257800" cy="1874520"/>
+            <a:ext cx="5257800" cy="1716865"/>
           </a:xfrm>
           <a:prstGeom prst="rect">
             <a:avLst/>
@@ -14016,7 +14101,7 @@
         <p:spPr>
           <a:xfrm>
             <a:off x="640080" y="2331720"/>
-            <a:ext cx="82296" cy="1874520"/>
+            <a:ext cx="82296" cy="1716865"/>
           </a:xfrm>
           <a:prstGeom prst="rect">
             <a:avLst/>
@@ -14074,7 +14159,7 @@
         </p:nvSpPr>
         <p:spPr>
           <a:xfrm>
-            <a:off x="960120" y="2862072"/>
+            <a:off x="960120" y="2962972"/>
             <a:ext cx="4709160" cy="502920"/>
           </a:xfrm>
           <a:prstGeom prst="rect">
@@ -14091,7 +14176,7 @@
               <a:buNone/>
             </a:pPr>
             <a:r>
-              <a:rPr lang="en-US" sz="1900" b="1" dirty="0">
+              <a:rPr lang="en-US" sz="2800" b="1" dirty="0">
                 <a:solidFill>
                   <a:srgbClr val="2B2B2B"/>
                 </a:solidFill>
@@ -14101,54 +14186,12 @@
               </a:rPr>
               <a:t>Random Forest + TF-IDF</a:t>
             </a:r>
-            <a:endParaRPr lang="en-US" sz="1900" dirty="0"/>
+            <a:endParaRPr lang="en-US" sz="2800" dirty="0"/>
           </a:p>
         </p:txBody>
       </p:sp>
       <p:sp>
         <p:nvSpPr>
-          <p:cNvPr id="10" name="Text 8"/>
-          <p:cNvSpPr/>
-          <p:nvPr/>
-        </p:nvSpPr>
-        <p:spPr>
-          <a:xfrm>
-            <a:off x="960120" y="3410712"/>
-            <a:ext cx="4617720" cy="731520"/>
-          </a:xfrm>
-          <a:prstGeom prst="rect">
-            <a:avLst/>
-          </a:prstGeom>
-          <a:noFill/>
-          <a:ln/>
-        </p:spPr>
-        <p:txBody>
-          <a:bodyPr wrap="square" lIns="0" tIns="0" rIns="0" bIns="0" rtlCol="0" anchor="ctr"/>
-          <a:lstStyle/>
-          <a:p>
-            <a:pPr marL="0" indent="0">
-              <a:lnSpc>
-                <a:spcPct val="125000"/>
-              </a:lnSpc>
-              <a:buNone/>
-            </a:pPr>
-            <a:r>
-              <a:rPr lang="en-US" sz="1300" dirty="0">
-                <a:solidFill>
-                  <a:srgbClr val="6B6B6B"/>
-                </a:solidFill>
-                <a:latin typeface="Calibri" pitchFamily="34" charset="0"/>
-                <a:ea typeface="Calibri" pitchFamily="34" charset="-122"/>
-                <a:cs typeface="Calibri" pitchFamily="34" charset="-120"/>
-              </a:rPr>
-              <a:t>TF-IDF 向量化（max_features = 20,000，stop_words = 'english'），作為傳統機器學習基準模型。</a:t>
-            </a:r>
-            <a:endParaRPr lang="en-US" sz="1300" dirty="0"/>
-          </a:p>
-        </p:txBody>
-      </p:sp>
-      <p:sp>
-        <p:nvSpPr>
           <p:cNvPr id="11" name="Shape 9"/>
           <p:cNvSpPr/>
           <p:nvPr/>
@@ -14156,7 +14199,7 @@
         <p:spPr>
           <a:xfrm>
             <a:off x="6263640" y="2331720"/>
-            <a:ext cx="5257800" cy="1874520"/>
+            <a:ext cx="5257800" cy="1716865"/>
           </a:xfrm>
           <a:prstGeom prst="rect">
             <a:avLst/>
@@ -14188,7 +14231,7 @@
         <p:spPr>
           <a:xfrm>
             <a:off x="6263640" y="2331720"/>
-            <a:ext cx="82296" cy="1874520"/>
+            <a:ext cx="82296" cy="1716865"/>
           </a:xfrm>
           <a:prstGeom prst="rect">
             <a:avLst/>
@@ -14246,7 +14289,7 @@
         </p:nvSpPr>
         <p:spPr>
           <a:xfrm>
-            <a:off x="6583680" y="2862072"/>
+            <a:off x="6583680" y="2965494"/>
             <a:ext cx="4709160" cy="502920"/>
           </a:xfrm>
           <a:prstGeom prst="rect">
@@ -14263,7 +14306,7 @@
               <a:buNone/>
             </a:pPr>
             <a:r>
-              <a:rPr lang="en-US" sz="1900" b="1" dirty="0">
+              <a:rPr lang="en-US" sz="2800" b="1" dirty="0" err="1">
                 <a:solidFill>
                   <a:srgbClr val="2B2B2B"/>
                 </a:solidFill>
@@ -14271,51 +14314,9 @@
                 <a:ea typeface="Georgia" pitchFamily="34" charset="-122"/>
                 <a:cs typeface="Georgia" pitchFamily="34" charset="-120"/>
               </a:rPr>
-              <a:t>DistilBERT (distilbert-base-uncased)</a:t>
+              <a:t>DistilBERT</a:t>
             </a:r>
-            <a:endParaRPr lang="en-US" sz="1900" dirty="0"/>
-          </a:p>
-        </p:txBody>
-      </p:sp>
-      <p:sp>
-        <p:nvSpPr>
-          <p:cNvPr id="15" name="Text 13"/>
-          <p:cNvSpPr/>
-          <p:nvPr/>
-        </p:nvSpPr>
-        <p:spPr>
-          <a:xfrm>
-            <a:off x="6583680" y="3410712"/>
-            <a:ext cx="4617720" cy="731520"/>
-          </a:xfrm>
-          <a:prstGeom prst="rect">
-            <a:avLst/>
-          </a:prstGeom>
-          <a:noFill/>
-          <a:ln/>
-        </p:spPr>
-        <p:txBody>
-          <a:bodyPr wrap="square" lIns="0" tIns="0" rIns="0" bIns="0" rtlCol="0" anchor="ctr"/>
-          <a:lstStyle/>
-          <a:p>
-            <a:pPr marL="0" indent="0">
-              <a:lnSpc>
-                <a:spcPct val="125000"/>
-              </a:lnSpc>
-              <a:buNone/>
-            </a:pPr>
-            <a:r>
-              <a:rPr lang="en-US" sz="1300" dirty="0">
-                <a:solidFill>
-                  <a:srgbClr val="6B6B6B"/>
-                </a:solidFill>
-                <a:latin typeface="Calibri" pitchFamily="34" charset="0"/>
-                <a:ea typeface="Calibri" pitchFamily="34" charset="-122"/>
-                <a:cs typeface="Calibri" pitchFamily="34" charset="-120"/>
-              </a:rPr>
-              <a:t>BERT 輕量化版本，能理解詞彙深層語境；針對新聞資料集微調，學習辨識誤導性資訊特徵。</a:t>
-            </a:r>
-            <a:endParaRPr lang="en-US" sz="1300" dirty="0"/>
+            <a:endParaRPr lang="en-US" sz="2800" dirty="0"/>
           </a:p>
         </p:txBody>
       </p:sp>
@@ -14548,7 +14549,7 @@
                 <a:ea typeface="Calibri" pitchFamily="34" charset="-122"/>
                 <a:cs typeface="Calibri" pitchFamily="34" charset="-120"/>
               </a:rPr>
-              <a:t>GPU．FP16 混合精度</a:t>
+              <a:t>GPU</a:t>
             </a:r>
             <a:endParaRPr lang="en-US" sz="1150" dirty="0"/>
           </a:p>
